--- a/make_presentation/templates/templates/premium/no_logo_7.pptx
+++ b/make_presentation/templates/templates/premium/no_logo_7.pptx
@@ -301,7 +301,7 @@
             <a:pPr algn="r">
               <a:buNone/>
             </a:pPr>
-            <a:fld id="{9B09F042-D794-4A39-91EF-BC6BCE0B2B5C}" type="slidenum">
+            <a:fld id="{09DE29FD-5152-48B5-A81B-CB62A37F2EE6}" type="slidenum">
               <a:rPr b="0" lang="en-US" sz="1400" spc="-1" strike="noStrike">
                 <a:latin typeface="Times New Roman"/>
               </a:rPr>
@@ -442,7 +442,7 @@
               </a:lnSpc>
               <a:buNone/>
             </a:pPr>
-            <a:fld id="{78428082-3B42-4E40-8AAB-38E9624CB3CF}" type="slidenum">
+            <a:fld id="{D96DDAB1-952A-4D49-A612-B1445752A49D}" type="slidenum">
               <a:rPr b="0" lang="en-US" sz="1800" spc="-1" strike="noStrike">
                 <a:solidFill>
                   <a:srgbClr val="000000"/>
@@ -586,7 +586,7 @@
               </a:lnSpc>
               <a:buNone/>
             </a:pPr>
-            <a:fld id="{7AD7AC59-2189-443A-BCAE-1ADFC450BC73}" type="slidenum">
+            <a:fld id="{BA56C7F1-0CCB-4A5F-82D6-98C7F3E7C170}" type="slidenum">
               <a:rPr b="0" lang="en-US" sz="1800" spc="-1" strike="noStrike">
                 <a:solidFill>
                   <a:srgbClr val="000000"/>
@@ -730,7 +730,7 @@
               </a:lnSpc>
               <a:buNone/>
             </a:pPr>
-            <a:fld id="{1107F693-7A7B-4390-8678-E77890EEC3FF}" type="slidenum">
+            <a:fld id="{78F41A24-39A7-4C73-A292-E2C38DA818F3}" type="slidenum">
               <a:rPr b="0" lang="en-US" sz="1800" spc="-1" strike="noStrike">
                 <a:solidFill>
                   <a:srgbClr val="000000"/>
@@ -874,7 +874,7 @@
               </a:lnSpc>
               <a:buNone/>
             </a:pPr>
-            <a:fld id="{09AA3E19-E76B-4094-9CBD-8DB1547DECB6}" type="slidenum">
+            <a:fld id="{0317FD74-697F-4EFB-BAE4-37CD9D39FFCD}" type="slidenum">
               <a:rPr b="0" lang="en-US" sz="1800" spc="-1" strike="noStrike">
                 <a:solidFill>
                   <a:srgbClr val="000000"/>
@@ -1018,7 +1018,7 @@
               </a:lnSpc>
               <a:buNone/>
             </a:pPr>
-            <a:fld id="{90456176-E325-4B2F-8792-EDD1976F4C1E}" type="slidenum">
+            <a:fld id="{EF146930-BDB0-4CAC-88BE-BC4614BDFF6B}" type="slidenum">
               <a:rPr b="0" lang="en-US" sz="1800" spc="-1" strike="noStrike">
                 <a:solidFill>
                   <a:srgbClr val="000000"/>
@@ -1162,7 +1162,7 @@
               </a:lnSpc>
               <a:buNone/>
             </a:pPr>
-            <a:fld id="{2BFDB47B-EBA6-4EC3-95B3-098E23965C93}" type="slidenum">
+            <a:fld id="{B17CF14F-29BC-41A0-A0CB-FAAD64A233FB}" type="slidenum">
               <a:rPr b="0" lang="en-US" sz="1800" spc="-1" strike="noStrike">
                 <a:solidFill>
                   <a:srgbClr val="000000"/>
@@ -1306,7 +1306,7 @@
               </a:lnSpc>
               <a:buNone/>
             </a:pPr>
-            <a:fld id="{BB32CE35-9086-4A46-A321-7F9CB17EE44F}" type="slidenum">
+            <a:fld id="{32BA4F0F-76E9-4BB1-B4EC-B07E52239BFC}" type="slidenum">
               <a:rPr b="0" lang="en-US" sz="1800" spc="-1" strike="noStrike">
                 <a:solidFill>
                   <a:srgbClr val="000000"/>
@@ -3349,7 +3349,7 @@
         <p:spPr>
           <a:xfrm>
             <a:off x="457200" y="4027680"/>
-            <a:ext cx="10287000" cy="2030760"/>
+            <a:ext cx="10928880" cy="2030760"/>
           </a:xfrm>
           <a:prstGeom prst="rect">
             <a:avLst/>
@@ -3380,7 +3380,7 @@
               </a:tabLst>
             </a:pPr>
             <a:r>
-              <a:rPr b="1" lang="en-US" sz="4000" spc="-1" strike="noStrike">
+              <a:rPr b="1" lang="en-US" sz="4800" spc="-1" strike="noStrike">
                 <a:solidFill>
                   <a:srgbClr val="ffffff"/>
                 </a:solidFill>
@@ -3389,7 +3389,7 @@
               </a:rPr>
               <a:t>TITLE</a:t>
             </a:r>
-            <a:endParaRPr b="0" lang="en-US" sz="4000" spc="-1" strike="noStrike">
+            <a:endParaRPr b="0" lang="en-US" sz="4800" spc="-1" strike="noStrike">
               <a:latin typeface="Arial"/>
             </a:endParaRPr>
           </a:p>
